--- a/src/pptx_agent_maker/templates/project/specimen.pptx
+++ b/src/pptx_agent_maker/templates/project/specimen.pptx
@@ -3145,20 +3145,6 @@
           </a:ln>
           <a:effectLst/>
         </p:spPr>
-        <p:style>
-          <a:lnRef idx="1">
-            <a:schemeClr val="accent1"/>
-          </a:lnRef>
-          <a:fillRef idx="3">
-            <a:schemeClr val="accent1"/>
-          </a:fillRef>
-          <a:effectRef idx="2">
-            <a:schemeClr val="accent1"/>
-          </a:effectRef>
-          <a:fontRef idx="minor">
-            <a:schemeClr val="lt1"/>
-          </a:fontRef>
-        </p:style>
         <p:txBody>
           <a:bodyPr rtlCol="0" anchor="ctr"/>
           <a:lstStyle/>
